--- a/ゲーム科2年/00_前期/ゲーム開発Ⅰ/ゲーム物理学/座学/15_力の単位（ニュートン）.pptx
+++ b/ゲーム科2年/00_前期/ゲーム開発Ⅰ/ゲーム物理学/座学/15_力の単位（ニュートン）.pptx
@@ -4343,8 +4343,8 @@
           </mc:AlternateContent>
         </p:grpSp>
       </p:grpSp>
-      <mc:AlternateContent xmlns:mc="http://schemas.openxmlformats.org/markup-compatibility/2006">
-        <mc:Choice xmlns:a14="http://schemas.microsoft.com/office/drawing/2010/main" Requires="a14">
+      <mc:AlternateContent xmlns:mc="http://schemas.openxmlformats.org/markup-compatibility/2006" xmlns:a14="http://schemas.microsoft.com/office/drawing/2010/main">
+        <mc:Choice Requires="a14">
           <p:sp>
             <p:nvSpPr>
               <p:cNvPr id="9" name="テキスト ボックス 8">
@@ -4432,13 +4432,7 @@
                       <a:rPr lang="en-US" altLang="ja-JP" sz="2400" b="0" i="1" smtClean="0">
                         <a:latin typeface="Cambria Math" panose="02040503050406030204" pitchFamily="18" charset="0"/>
                       </a:rPr>
-                      <m:t>(</m:t>
-                    </m:r>
-                    <m:r>
-                      <a:rPr lang="en-US" altLang="ja-JP" sz="2400" b="0" i="1" smtClean="0">
-                        <a:latin typeface="Cambria Math" panose="02040503050406030204" pitchFamily="18" charset="0"/>
-                      </a:rPr>
-                      <m:t>−9.8</m:t>
+                      <m:t>(−9.8</m:t>
                     </m:r>
                     <m:r>
                       <a:rPr lang="en-US" altLang="ja-JP" sz="2400" b="0" i="1" smtClean="0">
@@ -4572,7 +4566,7 @@
             </p:txBody>
           </p:sp>
         </mc:Choice>
-        <mc:Fallback>
+        <mc:Fallback xmlns="">
           <p:sp>
             <p:nvSpPr>
               <p:cNvPr id="9" name="テキスト ボックス 8">
@@ -4737,8 +4731,8 @@
           </a:p>
         </p:txBody>
       </p:sp>
-      <mc:AlternateContent xmlns:mc="http://schemas.openxmlformats.org/markup-compatibility/2006">
-        <mc:Choice xmlns:a14="http://schemas.microsoft.com/office/drawing/2010/main" Requires="a14">
+      <mc:AlternateContent xmlns:mc="http://schemas.openxmlformats.org/markup-compatibility/2006" xmlns:a14="http://schemas.microsoft.com/office/drawing/2010/main">
+        <mc:Choice Requires="a14">
           <p:sp>
             <p:nvSpPr>
               <p:cNvPr id="6" name="テキスト ボックス 5">
@@ -4973,7 +4967,7 @@
             </p:txBody>
           </p:sp>
         </mc:Choice>
-        <mc:Fallback>
+        <mc:Fallback xmlns="">
           <p:sp>
             <p:nvSpPr>
               <p:cNvPr id="6" name="テキスト ボックス 5">
@@ -5131,7 +5125,7 @@
               <a:p>
                 <a:r>
                   <a:rPr lang="ja-JP" altLang="en-US" sz="2400" dirty="0"/>
-                  <a:t>体重計にかかった力は何</a:t>
+                  <a:t>この時、体重計にかかった力は何</a:t>
                 </a:r>
                 <a:r>
                   <a:rPr lang="en-US" altLang="ja-JP" sz="2400" dirty="0"/>
@@ -5286,7 +5280,7 @@
                       <a:rPr lang="en-US" altLang="ja-JP" sz="2400" b="0" i="1" smtClean="0">
                         <a:latin typeface="Cambria Math" panose="02040503050406030204" pitchFamily="18" charset="0"/>
                       </a:rPr>
-                      <m:t>=686</m:t>
+                      <m:t>=−686</m:t>
                     </m:r>
                     <m:r>
                       <a:rPr lang="en-US" altLang="ja-JP" sz="2400" b="0" i="1" smtClean="0">
@@ -5501,7 +5495,7 @@
             <p:spPr>
               <a:xfrm>
                 <a:off x="567542" y="1216429"/>
-                <a:ext cx="9799478" cy="2677656"/>
+                <a:ext cx="9799478" cy="3416320"/>
               </a:xfrm>
               <a:prstGeom prst="rect">
                 <a:avLst/>
@@ -5692,13 +5686,7 @@
                       <a:rPr lang="en-US" altLang="ja-JP" sz="2400" b="0" i="1" smtClean="0">
                         <a:latin typeface="Cambria Math" panose="02040503050406030204" pitchFamily="18" charset="0"/>
                       </a:rPr>
-                      <m:t>=−548.</m:t>
-                    </m:r>
-                    <m:r>
-                      <a:rPr lang="en-US" altLang="ja-JP" sz="2400" i="1" dirty="0">
-                        <a:latin typeface="Cambria Math" panose="02040503050406030204" pitchFamily="18" charset="0"/>
-                      </a:rPr>
-                      <m:t>8</m:t>
+                      <m:t>=−548.8</m:t>
                     </m:r>
                     <m:r>
                       <a:rPr lang="en-US" altLang="ja-JP" sz="2400" i="1" dirty="0">
@@ -5759,13 +5747,7 @@
                       <a:rPr lang="en-US" altLang="ja-JP" sz="2400" i="1">
                         <a:latin typeface="Cambria Math" panose="02040503050406030204" pitchFamily="18" charset="0"/>
                       </a:rPr>
-                      <m:t>)</m:t>
-                    </m:r>
-                    <m:r>
-                      <a:rPr lang="en-US" altLang="ja-JP" sz="2400" i="1">
-                        <a:latin typeface="Cambria Math" panose="02040503050406030204" pitchFamily="18" charset="0"/>
-                      </a:rPr>
-                      <m:t>=</m:t>
+                      <m:t>)=</m:t>
                     </m:r>
                     <m:r>
                       <a:rPr lang="en-US" altLang="ja-JP" sz="2400" b="1" i="1" smtClean="0">
@@ -5795,7 +5777,20 @@
                   </a:rPr>
                   <a:t> </a:t>
                 </a:r>
-                <a:endParaRPr lang="en-US" altLang="ja-JP" sz="2400" b="1" dirty="0"/>
+              </a:p>
+              <a:p>
+                <a:endParaRPr lang="en-US" altLang="ja-JP" sz="2400" b="1" dirty="0">
+                  <a:solidFill>
+                    <a:srgbClr val="FF0000"/>
+                  </a:solidFill>
+                </a:endParaRPr>
+              </a:p>
+              <a:p>
+                <a:r>
+                  <a:rPr lang="ja-JP" altLang="en-US" sz="2400" dirty="0"/>
+                  <a:t>単位も正しく約分されます。</a:t>
+                </a:r>
+                <a:endParaRPr lang="en-US" altLang="ja-JP" sz="2400" dirty="0"/>
               </a:p>
             </p:txBody>
           </p:sp>
@@ -5818,7 +5813,7 @@
             <p:spPr>
               <a:xfrm>
                 <a:off x="567542" y="1216429"/>
-                <a:ext cx="9799478" cy="2677656"/>
+                <a:ext cx="9799478" cy="3416320"/>
               </a:xfrm>
               <a:prstGeom prst="rect">
                 <a:avLst/>
@@ -5826,7 +5821,7 @@
               <a:blipFill>
                 <a:blip r:embed="rId2"/>
                 <a:stretch>
-                  <a:fillRect l="-933" t="-1822" b="-2278"/>
+                  <a:fillRect l="-933" t="-1429" b="-3214"/>
                 </a:stretch>
               </a:blipFill>
             </p:spPr>
